--- a/_pages/teaching/3mt.pptx
+++ b/_pages/teaching/3mt.pptx
@@ -17,8 +17,7 @@
     <p:sldId id="261" r:id="rId11"/>
     <p:sldId id="262" r:id="rId12"/>
     <p:sldId id="263" r:id="rId13"/>
-    <p:sldId id="258" r:id="rId14"/>
-    <p:sldId id="257" r:id="rId15"/>
+    <p:sldId id="257" r:id="rId14"/>
   </p:sldIdLst>
   <p:sldSz cx="12192000" cy="6858000"/>
   <p:notesSz cx="6858000" cy="9144000"/>
@@ -5505,215 +5504,6 @@
 </file>
 
 <file path=ppt/slides/slide13.xml><?xml version="1.0" encoding="utf-8"?>
-<p:sld xmlns:a="http://schemas.openxmlformats.org/drawingml/2006/main" xmlns:r="http://schemas.openxmlformats.org/officeDocument/2006/relationships" xmlns:p="http://schemas.openxmlformats.org/presentationml/2006/main">
-  <p:cSld>
-    <p:spTree>
-      <p:nvGrpSpPr>
-        <p:cNvPr id="1" name=""/>
-        <p:cNvGrpSpPr/>
-        <p:nvPr/>
-      </p:nvGrpSpPr>
-      <p:grpSpPr>
-        <a:xfrm>
-          <a:off x="0" y="0"/>
-          <a:ext cx="0" cy="0"/>
-          <a:chOff x="0" y="0"/>
-          <a:chExt cx="0" cy="0"/>
-        </a:xfrm>
-      </p:grpSpPr>
-      <p:sp>
-        <p:nvSpPr>
-          <p:cNvPr id="2" name="Title 1">
-            <a:extLst>
-              <a:ext uri="{FF2B5EF4-FFF2-40B4-BE49-F238E27FC236}">
-                <a16:creationId xmlns:a16="http://schemas.microsoft.com/office/drawing/2014/main" id="{8F63CA92-B77D-7990-754B-EF5AF20A0323}"/>
-              </a:ext>
-            </a:extLst>
-          </p:cNvPr>
-          <p:cNvSpPr>
-            <a:spLocks noGrp="1"/>
-          </p:cNvSpPr>
-          <p:nvPr>
-            <p:ph type="title"/>
-          </p:nvPr>
-        </p:nvSpPr>
-        <p:spPr/>
-        <p:txBody>
-          <a:bodyPr/>
-          <a:lstStyle/>
-          <a:p>
-            <a:r>
-              <a:rPr lang="en-AU" dirty="0"/>
-              <a:t>Oxford’s official 3MT</a:t>
-            </a:r>
-          </a:p>
-        </p:txBody>
-      </p:sp>
-      <p:sp>
-        <p:nvSpPr>
-          <p:cNvPr id="6" name="Rectangle 3">
-            <a:extLst>
-              <a:ext uri="{FF2B5EF4-FFF2-40B4-BE49-F238E27FC236}">
-                <a16:creationId xmlns:a16="http://schemas.microsoft.com/office/drawing/2014/main" id="{1E722622-3AD9-E99E-F13B-62C34C2009D4}"/>
-              </a:ext>
-            </a:extLst>
-          </p:cNvPr>
-          <p:cNvSpPr>
-            <a:spLocks noGrp="1" noChangeArrowheads="1"/>
-          </p:cNvSpPr>
-          <p:nvPr>
-            <p:ph idx="1"/>
-          </p:nvPr>
-        </p:nvSpPr>
-        <p:spPr bwMode="auto">
-          <a:xfrm>
-            <a:off x="838200" y="2025951"/>
-            <a:ext cx="10515600" cy="2544286"/>
-          </a:xfrm>
-          <a:prstGeom prst="rect">
-            <a:avLst/>
-          </a:prstGeom>
-          <a:noFill/>
-          <a:ln>
-            <a:noFill/>
-          </a:ln>
-          <a:effectLst/>
-          <a:extLst>
-            <a:ext uri="{909E8E84-426E-40DD-AFC4-6F175D3DCCD1}">
-              <a14:hiddenFill xmlns:a14="http://schemas.microsoft.com/office/drawing/2010/main">
-                <a:solidFill>
-                  <a:schemeClr val="accent1"/>
-                </a:solidFill>
-              </a14:hiddenFill>
-            </a:ext>
-            <a:ext uri="{91240B29-F687-4F45-9708-019B960494DF}">
-              <a14:hiddenLine xmlns:a14="http://schemas.microsoft.com/office/drawing/2010/main" w="9525">
-                <a:solidFill>
-                  <a:schemeClr val="tx1"/>
-                </a:solidFill>
-                <a:miter lim="800000"/>
-                <a:headEnd/>
-                <a:tailEnd/>
-              </a14:hiddenLine>
-            </a:ext>
-            <a:ext uri="{AF507438-7753-43E0-B8FC-AC1667EBCBE1}">
-              <a14:hiddenEffects xmlns:a14="http://schemas.microsoft.com/office/drawing/2010/main">
-                <a:effectLst>
-                  <a:outerShdw dist="35921" dir="2700000" algn="ctr" rotWithShape="0">
-                    <a:schemeClr val="bg2"/>
-                  </a:outerShdw>
-                </a:effectLst>
-              </a14:hiddenEffects>
-            </a:ext>
-          </a:extLst>
-        </p:spPr>
-        <p:txBody>
-          <a:bodyPr vert="horz" wrap="square" lIns="91440" tIns="45720" rIns="91440" bIns="45720" numCol="1" anchor="ctr" anchorCtr="0" compatLnSpc="1">
-            <a:prstTxWarp prst="textNoShape">
-              <a:avLst/>
-            </a:prstTxWarp>
-            <a:spAutoFit/>
-          </a:bodyPr>
-          <a:lstStyle/>
-          <a:p>
-            <a:pPr marR="0" lvl="0" fontAlgn="base">
-              <a:spcAft>
-                <a:spcPct val="0"/>
-              </a:spcAft>
-              <a:buClrTx/>
-              <a:buSzTx/>
-              <a:tabLst/>
-            </a:pPr>
-            <a:r>
-              <a:rPr lang="en-US" altLang="en-US" dirty="0"/>
-              <a:t>Open to DPhil students</a:t>
-            </a:r>
-          </a:p>
-          <a:p>
-            <a:pPr marR="0" lvl="0" fontAlgn="base">
-              <a:spcAft>
-                <a:spcPct val="0"/>
-              </a:spcAft>
-              <a:buClrTx/>
-              <a:buSzTx/>
-              <a:tabLst/>
-            </a:pPr>
-            <a:r>
-              <a:rPr lang="en-US" altLang="en-US" dirty="0"/>
-              <a:t>Training: </a:t>
-            </a:r>
-            <a:r>
-              <a:rPr lang="en-US" altLang="en-US" dirty="0">
-                <a:hlinkClick r:id="rId2">
-                  <a:extLst>
-                    <a:ext uri="{A12FA001-AC4F-418D-AE19-62706E023703}">
-                      <ahyp:hlinkClr xmlns:ahyp="http://schemas.microsoft.com/office/drawing/2018/hyperlinkcolor" val="tx"/>
-                    </a:ext>
-                  </a:extLst>
-                </a:hlinkClick>
-              </a:rPr>
-              <a:t>Thursday 30th April, 10am - 12pm</a:t>
-            </a:r>
-            <a:endParaRPr lang="en-US" altLang="en-US" dirty="0"/>
-          </a:p>
-          <a:p>
-            <a:pPr marR="0" lvl="0" fontAlgn="base">
-              <a:spcAft>
-                <a:spcPct val="0"/>
-              </a:spcAft>
-              <a:buClrTx/>
-              <a:buSzTx/>
-              <a:tabLst/>
-            </a:pPr>
-            <a:r>
-              <a:rPr lang="en-US" altLang="en-US" dirty="0"/>
-              <a:t>Applications open: Wednesday 1st April 2026</a:t>
-            </a:r>
-          </a:p>
-          <a:p>
-            <a:pPr marR="0" lvl="0" fontAlgn="base">
-              <a:spcAft>
-                <a:spcPct val="0"/>
-              </a:spcAft>
-              <a:buClrTx/>
-              <a:buSzTx/>
-              <a:tabLst/>
-            </a:pPr>
-            <a:r>
-              <a:rPr lang="en-US" altLang="en-US" dirty="0"/>
-              <a:t>Deadline to apply to the competition: 5pm 22nd May 2026</a:t>
-            </a:r>
-          </a:p>
-          <a:p>
-            <a:pPr marR="0" lvl="0" fontAlgn="base">
-              <a:spcAft>
-                <a:spcPct val="0"/>
-              </a:spcAft>
-              <a:buClrTx/>
-              <a:buSzTx/>
-              <a:tabLst/>
-            </a:pPr>
-            <a:r>
-              <a:rPr lang="en-US" altLang="en-US" dirty="0"/>
-              <a:t>Oxford Final: Wednesday 17th June 2026</a:t>
-            </a:r>
-          </a:p>
-        </p:txBody>
-      </p:sp>
-    </p:spTree>
-    <p:extLst>
-      <p:ext uri="{BB962C8B-B14F-4D97-AF65-F5344CB8AC3E}">
-        <p14:creationId xmlns:p14="http://schemas.microsoft.com/office/powerpoint/2010/main" val="1384678789"/>
-      </p:ext>
-    </p:extLst>
-  </p:cSld>
-  <p:clrMapOvr>
-    <a:masterClrMapping/>
-  </p:clrMapOvr>
-</p:sld>
-</file>
-
-<file path=ppt/slides/slide14.xml><?xml version="1.0" encoding="utf-8"?>
 <p:sld xmlns:a="http://schemas.openxmlformats.org/drawingml/2006/main" xmlns:r="http://schemas.openxmlformats.org/officeDocument/2006/relationships" xmlns:p="http://schemas.openxmlformats.org/presentationml/2006/main">
   <p:cSld>
     <p:spTree>
